--- a/git-ai-ppt/git-ai-research-record.pptx
+++ b/git-ai-ppt/git-ai-research-record.pptx
@@ -6,7 +6,7 @@
     <p:sldMasterId id="2147483661" r:id="rId2"/>
   </p:sldMasterIdLst>
   <p:handoutMasterIdLst>
-    <p:handoutMasterId r:id="rId43"/>
+    <p:handoutMasterId r:id="rId44"/>
   </p:handoutMasterIdLst>
   <p:sldIdLst>
     <p:sldId id="272" r:id="rId3"/>
@@ -49,11 +49,12 @@
     <p:sldId id="288" r:id="rId40"/>
     <p:sldId id="302" r:id="rId41"/>
     <p:sldId id="303" r:id="rId42"/>
+    <p:sldId id="305" r:id="rId43"/>
   </p:sldIdLst>
   <p:sldSz cx="12192000" cy="6858000"/>
   <p:notesSz cx="6858000" cy="9144000"/>
   <p:custDataLst>
-    <p:tags r:id="rId44"/>
+    <p:tags r:id="rId45"/>
   </p:custDataLst>
   <p:defaultTextStyle>
     <a:defPPr>
@@ -334,7 +335,7 @@
             </a:pPr>
             <a:fld id="{470563E6-95EB-4370-8635-C2BF33E7666D}" type="datetime1">
               <a:rPr lang="zh-CN" altLang="en-US"/>
-              <a:t>2026/8/18</a:t>
+              <a:t>2026/8/25</a:t>
             </a:fld>
             <a:endParaRPr lang="en-US" altLang="zh-CN"/>
           </a:p>
@@ -52583,14 +52584,38 @@
               </a:spcAft>
             </a:pPr>
             <a:r>
-              <a:rPr sz="2800" b="1">
+              <a:rPr sz="2800" b="1" dirty="0" err="1">
                 <a:solidFill>
                   <a:srgbClr val="213261"/>
                 </a:solidFill>
                 <a:latin typeface="Microsoft YaHei"/>
               </a:rPr>
-              <a:t>上线后 Bug 回顾：真实运行暴露的是组合风险</a:t>
-            </a:r>
+              <a:t>上线后</a:t>
+            </a:r>
+            <a:r>
+              <a:rPr sz="2800" b="1" dirty="0">
+                <a:solidFill>
+                  <a:srgbClr val="213261"/>
+                </a:solidFill>
+                <a:latin typeface="Microsoft YaHei"/>
+              </a:rPr>
+              <a:t> Bug </a:t>
+            </a:r>
+            <a:r>
+              <a:rPr sz="2800" b="1" dirty="0" err="1">
+                <a:solidFill>
+                  <a:srgbClr val="213261"/>
+                </a:solidFill>
+                <a:latin typeface="Microsoft YaHei"/>
+              </a:rPr>
+              <a:t>回顾：真实运行暴露的是组合风险</a:t>
+            </a:r>
+            <a:endParaRPr sz="2800" b="1" dirty="0">
+              <a:solidFill>
+                <a:srgbClr val="213261"/>
+              </a:solidFill>
+              <a:latin typeface="Microsoft YaHei"/>
+            </a:endParaRPr>
           </a:p>
         </p:txBody>
       </p:sp>
@@ -54520,6 +54545,181 @@
         </p:txBody>
       </p:sp>
     </p:spTree>
+  </p:cSld>
+  <p:clrMapOvr>
+    <a:masterClrMapping/>
+  </p:clrMapOvr>
+</p:sld>
+</file>
+
+<file path=ppt/slides/slide41.xml><?xml version="1.0" encoding="utf-8"?>
+<p:sld xmlns:a="http://schemas.openxmlformats.org/drawingml/2006/main" xmlns:r="http://schemas.openxmlformats.org/officeDocument/2006/relationships" xmlns:p="http://schemas.openxmlformats.org/presentationml/2006/main">
+  <p:cSld>
+    <p:spTree>
+      <p:nvGrpSpPr>
+        <p:cNvPr id="1" name=""/>
+        <p:cNvGrpSpPr/>
+        <p:nvPr/>
+      </p:nvGrpSpPr>
+      <p:grpSpPr>
+        <a:xfrm>
+          <a:off x="0" y="0"/>
+          <a:ext cx="0" cy="0"/>
+          <a:chOff x="0" y="0"/>
+          <a:chExt cx="0" cy="0"/>
+        </a:xfrm>
+      </p:grpSpPr>
+      <p:sp>
+        <p:nvSpPr>
+          <p:cNvPr id="2" name="文本框 1">
+            <a:extLst>
+              <a:ext uri="{FF2B5EF4-FFF2-40B4-BE49-F238E27FC236}">
+                <a16:creationId xmlns:a16="http://schemas.microsoft.com/office/drawing/2014/main" id="{B8DCDDA1-FF98-3816-F224-E0CCCCBE057D}"/>
+              </a:ext>
+            </a:extLst>
+          </p:cNvPr>
+          <p:cNvSpPr txBox="1"/>
+          <p:nvPr/>
+        </p:nvSpPr>
+        <p:spPr>
+          <a:xfrm>
+            <a:off x="119336" y="1052736"/>
+            <a:ext cx="5477269" cy="700576"/>
+          </a:xfrm>
+          <a:prstGeom prst="rect">
+            <a:avLst/>
+          </a:prstGeom>
+          <a:noFill/>
+        </p:spPr>
+        <p:txBody>
+          <a:bodyPr wrap="none" rtlCol="0">
+            <a:spAutoFit/>
+          </a:bodyPr>
+          <a:lstStyle/>
+          <a:p>
+            <a:pPr marL="342900" indent="-342900">
+              <a:lnSpc>
+                <a:spcPct val="150000"/>
+              </a:lnSpc>
+              <a:buAutoNum type="arabicPeriod"/>
+            </a:pPr>
+            <a:r>
+              <a:rPr kumimoji="1" lang="zh-CN" altLang="en-US" sz="1400" dirty="0"/>
+              <a:t>扩展了什么能力，比如 </a:t>
+            </a:r>
+            <a:r>
+              <a:rPr kumimoji="1" lang="en-US" altLang="zh-CN" sz="1400" dirty="0"/>
+              <a:t>token</a:t>
+            </a:r>
+            <a:r>
+              <a:rPr kumimoji="1" lang="zh-CN" altLang="en-US" sz="1400" dirty="0"/>
+              <a:t> 统计，这个前面的 </a:t>
+            </a:r>
+            <a:r>
+              <a:rPr kumimoji="1" lang="en-US" altLang="zh-CN" sz="1400" dirty="0"/>
+              <a:t>ppt</a:t>
+            </a:r>
+            <a:r>
+              <a:rPr kumimoji="1" lang="zh-CN" altLang="en-US" sz="1400" dirty="0"/>
+              <a:t> 都没写。</a:t>
+            </a:r>
+            <a:endParaRPr kumimoji="1" lang="en-US" altLang="zh-CN" sz="1400" dirty="0"/>
+          </a:p>
+          <a:p>
+            <a:pPr marL="342900" indent="-342900">
+              <a:lnSpc>
+                <a:spcPct val="150000"/>
+              </a:lnSpc>
+              <a:buAutoNum type="arabicPeriod"/>
+            </a:pPr>
+            <a:r>
+              <a:rPr kumimoji="1" lang="zh-CN" altLang="en-US" sz="1400" dirty="0"/>
+              <a:t>现在都支持了哪些 </a:t>
+            </a:r>
+            <a:r>
+              <a:rPr kumimoji="1" lang="en-US" altLang="zh-CN" sz="1400" dirty="0"/>
+              <a:t>coding</a:t>
+            </a:r>
+            <a:r>
+              <a:rPr kumimoji="1" lang="zh-CN" altLang="en-US" sz="1400" dirty="0"/>
+              <a:t> </a:t>
+            </a:r>
+            <a:r>
+              <a:rPr kumimoji="1" lang="en-US" altLang="zh-CN" sz="1400" dirty="0"/>
+              <a:t>agent</a:t>
+            </a:r>
+            <a:r>
+              <a:rPr kumimoji="1" lang="zh-CN" altLang="en-US" sz="1400" dirty="0"/>
+              <a:t>，可以用</a:t>
+            </a:r>
+            <a:r>
+              <a:rPr kumimoji="1" lang="zh-CN" altLang="en-US" sz="1400"/>
+              <a:t>图标表示下。</a:t>
+            </a:r>
+            <a:endParaRPr kumimoji="1" lang="zh-CN" altLang="en-US" sz="1400" dirty="0"/>
+          </a:p>
+        </p:txBody>
+      </p:sp>
+      <p:sp>
+        <p:nvSpPr>
+          <p:cNvPr id="3" name="页面标题">
+            <a:extLst>
+              <a:ext uri="{FF2B5EF4-FFF2-40B4-BE49-F238E27FC236}">
+                <a16:creationId xmlns:a16="http://schemas.microsoft.com/office/drawing/2014/main" id="{F141C037-C655-8C75-4275-A099146D1839}"/>
+              </a:ext>
+            </a:extLst>
+          </p:cNvPr>
+          <p:cNvSpPr txBox="1"/>
+          <p:nvPr/>
+        </p:nvSpPr>
+        <p:spPr>
+          <a:xfrm>
+            <a:off x="338328" y="223468"/>
+            <a:ext cx="11521440" cy="430887"/>
+          </a:xfrm>
+          <a:prstGeom prst="rect">
+            <a:avLst/>
+          </a:prstGeom>
+          <a:noFill/>
+        </p:spPr>
+        <p:txBody>
+          <a:bodyPr wrap="square" lIns="0" tIns="0" rIns="0" bIns="0" anchor="ctr">
+            <a:spAutoFit/>
+          </a:bodyPr>
+          <a:lstStyle/>
+          <a:p>
+            <a:pPr algn="l">
+              <a:lnSpc>
+                <a:spcPct val="100000"/>
+              </a:lnSpc>
+              <a:spcAft>
+                <a:spcPts val="0"/>
+              </a:spcAft>
+            </a:pPr>
+            <a:r>
+              <a:rPr lang="zh-CN" altLang="en-US" sz="2800" b="1" dirty="0">
+                <a:solidFill>
+                  <a:srgbClr val="213261"/>
+                </a:solidFill>
+                <a:latin typeface="Microsoft YaHei"/>
+              </a:rPr>
+              <a:t>待补充</a:t>
+            </a:r>
+            <a:endParaRPr sz="2800" b="1" dirty="0">
+              <a:solidFill>
+                <a:srgbClr val="213261"/>
+              </a:solidFill>
+              <a:latin typeface="Microsoft YaHei"/>
+            </a:endParaRPr>
+          </a:p>
+        </p:txBody>
+      </p:sp>
+    </p:spTree>
+    <p:extLst>
+      <p:ext uri="{BB962C8B-B14F-4D97-AF65-F5344CB8AC3E}">
+        <p14:creationId xmlns:p14="http://schemas.microsoft.com/office/powerpoint/2010/main" val="917004519"/>
+      </p:ext>
+    </p:extLst>
   </p:cSld>
   <p:clrMapOvr>
     <a:masterClrMapping/>

--- a/git-ai-ppt/git-ai-research-record.pptx
+++ b/git-ai-ppt/git-ai-research-record.pptx
@@ -6,7 +6,7 @@
     <p:sldMasterId id="2147483661" r:id="rId2"/>
   </p:sldMasterIdLst>
   <p:handoutMasterIdLst>
-    <p:handoutMasterId r:id="rId44"/>
+    <p:handoutMasterId r:id="rId45"/>
   </p:handoutMasterIdLst>
   <p:sldIdLst>
     <p:sldId id="272" r:id="rId3"/>
@@ -50,11 +50,12 @@
     <p:sldId id="302" r:id="rId41"/>
     <p:sldId id="303" r:id="rId42"/>
     <p:sldId id="305" r:id="rId43"/>
+    <p:sldId id="306" r:id="rId44"/>
   </p:sldIdLst>
   <p:sldSz cx="12192000" cy="6858000"/>
   <p:notesSz cx="6858000" cy="9144000"/>
   <p:custDataLst>
-    <p:tags r:id="rId45"/>
+    <p:tags r:id="rId46"/>
   </p:custDataLst>
   <p:defaultTextStyle>
     <a:defPPr>
@@ -335,7 +336,7 @@
             </a:pPr>
             <a:fld id="{470563E6-95EB-4370-8635-C2BF33E7666D}" type="datetime1">
               <a:rPr lang="zh-CN" altLang="en-US"/>
-              <a:t>2026/8/25</a:t>
+              <a:t>2026/9/2</a:t>
             </a:fld>
             <a:endParaRPr lang="en-US" altLang="zh-CN"/>
           </a:p>
@@ -54584,7 +54585,7 @@
         <p:spPr>
           <a:xfrm>
             <a:off x="119336" y="1052736"/>
-            <a:ext cx="5477269" cy="700576"/>
+            <a:ext cx="5477269" cy="1023742"/>
           </a:xfrm>
           <a:prstGeom prst="rect">
             <a:avLst/>
@@ -54650,13 +54651,53 @@
             </a:r>
             <a:r>
               <a:rPr kumimoji="1" lang="zh-CN" altLang="en-US" sz="1400" dirty="0"/>
-              <a:t>，可以用</a:t>
-            </a:r>
-            <a:r>
-              <a:rPr kumimoji="1" lang="zh-CN" altLang="en-US" sz="1400"/>
-              <a:t>图标表示下。</a:t>
-            </a:r>
-            <a:endParaRPr kumimoji="1" lang="zh-CN" altLang="en-US" sz="1400" dirty="0"/>
+              <a:t>，可以用图标表示下。</a:t>
+            </a:r>
+            <a:endParaRPr kumimoji="1" lang="en-US" altLang="zh-CN" sz="1400" dirty="0"/>
+          </a:p>
+          <a:p>
+            <a:pPr marL="342900" indent="-342900">
+              <a:lnSpc>
+                <a:spcPct val="150000"/>
+              </a:lnSpc>
+              <a:buAutoNum type="arabicPeriod"/>
+            </a:pPr>
+            <a:r>
+              <a:rPr kumimoji="1" lang="zh-CN" altLang="en-US" sz="1400" dirty="0"/>
+              <a:t>做了很多事在后台兼容 </a:t>
+            </a:r>
+            <a:r>
+              <a:rPr kumimoji="1" lang="en-US" altLang="zh-CN" sz="1400" dirty="0"/>
+              <a:t>kilo</a:t>
+            </a:r>
+            <a:r>
+              <a:rPr kumimoji="1" lang="zh-CN" altLang="en-US" sz="1400" dirty="0"/>
+              <a:t> </a:t>
+            </a:r>
+            <a:r>
+              <a:rPr kumimoji="1" lang="en-US" altLang="zh-CN" sz="1400" dirty="0"/>
+              <a:t>v5</a:t>
+            </a:r>
+            <a:r>
+              <a:rPr kumimoji="1" lang="zh-CN" altLang="en-US" sz="1400" dirty="0"/>
+              <a:t> 和 </a:t>
+            </a:r>
+            <a:r>
+              <a:rPr kumimoji="1" lang="en-US" altLang="zh-CN" sz="1400" dirty="0"/>
+              <a:t>git</a:t>
+            </a:r>
+            <a:r>
+              <a:rPr kumimoji="1" lang="zh-CN" altLang="en-US" sz="1400" dirty="0"/>
+              <a:t> </a:t>
+            </a:r>
+            <a:r>
+              <a:rPr kumimoji="1" lang="en-US" altLang="zh-CN" sz="1400" dirty="0"/>
+              <a:t>ai</a:t>
+            </a:r>
+            <a:r>
+              <a:rPr kumimoji="1" lang="zh-CN" altLang="en-US" sz="1400" dirty="0"/>
+              <a:t>。</a:t>
+            </a:r>
           </a:p>
         </p:txBody>
       </p:sp>
@@ -54718,6 +54759,170 @@
     <p:extLst>
       <p:ext uri="{BB962C8B-B14F-4D97-AF65-F5344CB8AC3E}">
         <p14:creationId xmlns:p14="http://schemas.microsoft.com/office/powerpoint/2010/main" val="917004519"/>
+      </p:ext>
+    </p:extLst>
+  </p:cSld>
+  <p:clrMapOvr>
+    <a:masterClrMapping/>
+  </p:clrMapOvr>
+</p:sld>
+</file>
+
+<file path=ppt/slides/slide42.xml><?xml version="1.0" encoding="utf-8"?>
+<p:sld xmlns:a="http://schemas.openxmlformats.org/drawingml/2006/main" xmlns:r="http://schemas.openxmlformats.org/officeDocument/2006/relationships" xmlns:p="http://schemas.openxmlformats.org/presentationml/2006/main">
+  <p:cSld>
+    <p:spTree>
+      <p:nvGrpSpPr>
+        <p:cNvPr id="1" name="">
+          <a:extLst>
+            <a:ext uri="{FF2B5EF4-FFF2-40B4-BE49-F238E27FC236}">
+              <a16:creationId xmlns:a16="http://schemas.microsoft.com/office/drawing/2014/main" id="{191EA230-E29B-CE24-2363-7A9EC3329E73}"/>
+            </a:ext>
+          </a:extLst>
+        </p:cNvPr>
+        <p:cNvGrpSpPr/>
+        <p:nvPr/>
+      </p:nvGrpSpPr>
+      <p:grpSpPr>
+        <a:xfrm>
+          <a:off x="0" y="0"/>
+          <a:ext cx="0" cy="0"/>
+          <a:chOff x="0" y="0"/>
+          <a:chExt cx="0" cy="0"/>
+        </a:xfrm>
+      </p:grpSpPr>
+      <p:sp>
+        <p:nvSpPr>
+          <p:cNvPr id="2" name="文本框 1">
+            <a:extLst>
+              <a:ext uri="{FF2B5EF4-FFF2-40B4-BE49-F238E27FC236}">
+                <a16:creationId xmlns:a16="http://schemas.microsoft.com/office/drawing/2014/main" id="{9BF07D86-3A84-0B4E-5BDD-BF65AB80D86C}"/>
+              </a:ext>
+            </a:extLst>
+          </p:cNvPr>
+          <p:cNvSpPr txBox="1"/>
+          <p:nvPr/>
+        </p:nvSpPr>
+        <p:spPr>
+          <a:xfrm>
+            <a:off x="119336" y="1052736"/>
+            <a:ext cx="1074333" cy="700576"/>
+          </a:xfrm>
+          <a:prstGeom prst="rect">
+            <a:avLst/>
+          </a:prstGeom>
+          <a:noFill/>
+        </p:spPr>
+        <p:txBody>
+          <a:bodyPr wrap="none" rtlCol="0">
+            <a:spAutoFit/>
+          </a:bodyPr>
+          <a:lstStyle/>
+          <a:p>
+            <a:pPr marL="342900" indent="-342900">
+              <a:lnSpc>
+                <a:spcPct val="150000"/>
+              </a:lnSpc>
+              <a:buAutoNum type="arabicPeriod"/>
+            </a:pPr>
+            <a:r>
+              <a:rPr kumimoji="1" lang="en-US" altLang="zh-CN" sz="1400"/>
+              <a:t>Codex</a:t>
+            </a:r>
+            <a:endParaRPr kumimoji="1" lang="en-US" altLang="zh-CN" sz="1400" dirty="0"/>
+          </a:p>
+          <a:p>
+            <a:pPr marL="342900" indent="-342900">
+              <a:lnSpc>
+                <a:spcPct val="150000"/>
+              </a:lnSpc>
+              <a:buAutoNum type="arabicPeriod"/>
+            </a:pPr>
+            <a:endParaRPr kumimoji="1" lang="en-US" altLang="zh-CN" sz="1400" dirty="0"/>
+          </a:p>
+        </p:txBody>
+      </p:sp>
+      <p:sp>
+        <p:nvSpPr>
+          <p:cNvPr id="3" name="页面标题">
+            <a:extLst>
+              <a:ext uri="{FF2B5EF4-FFF2-40B4-BE49-F238E27FC236}">
+                <a16:creationId xmlns:a16="http://schemas.microsoft.com/office/drawing/2014/main" id="{DC179C58-D6C4-EF4A-2B32-BDC2C0EF1840}"/>
+              </a:ext>
+            </a:extLst>
+          </p:cNvPr>
+          <p:cNvSpPr txBox="1"/>
+          <p:nvPr/>
+        </p:nvSpPr>
+        <p:spPr>
+          <a:xfrm>
+            <a:off x="338328" y="223468"/>
+            <a:ext cx="11521440" cy="430887"/>
+          </a:xfrm>
+          <a:prstGeom prst="rect">
+            <a:avLst/>
+          </a:prstGeom>
+          <a:noFill/>
+        </p:spPr>
+        <p:txBody>
+          <a:bodyPr wrap="square" lIns="0" tIns="0" rIns="0" bIns="0" anchor="ctr">
+            <a:spAutoFit/>
+          </a:bodyPr>
+          <a:lstStyle/>
+          <a:p>
+            <a:pPr algn="l">
+              <a:lnSpc>
+                <a:spcPct val="100000"/>
+              </a:lnSpc>
+              <a:spcAft>
+                <a:spcPts val="0"/>
+              </a:spcAft>
+            </a:pPr>
+            <a:r>
+              <a:rPr lang="zh-CN" altLang="en-US" sz="2800" b="1" dirty="0">
+                <a:solidFill>
+                  <a:srgbClr val="213261"/>
+                </a:solidFill>
+              </a:rPr>
+              <a:t>支持的 </a:t>
+            </a:r>
+            <a:r>
+              <a:rPr lang="en-US" altLang="zh-CN" sz="2800" b="1" dirty="0">
+                <a:solidFill>
+                  <a:srgbClr val="213261"/>
+                </a:solidFill>
+              </a:rPr>
+              <a:t>coding</a:t>
+            </a:r>
+            <a:r>
+              <a:rPr lang="zh-CN" altLang="en-US" sz="2800" b="1" dirty="0">
+                <a:solidFill>
+                  <a:srgbClr val="213261"/>
+                </a:solidFill>
+              </a:rPr>
+              <a:t> </a:t>
+            </a:r>
+            <a:r>
+              <a:rPr lang="en-US" altLang="zh-CN" sz="2800" b="1" dirty="0">
+                <a:solidFill>
+                  <a:srgbClr val="213261"/>
+                </a:solidFill>
+              </a:rPr>
+              <a:t>agent</a:t>
+            </a:r>
+            <a:endParaRPr sz="2800" b="1" dirty="0">
+              <a:solidFill>
+                <a:srgbClr val="213261"/>
+              </a:solidFill>
+              <a:latin typeface="Microsoft YaHei"/>
+            </a:endParaRPr>
+          </a:p>
+        </p:txBody>
+      </p:sp>
+    </p:spTree>
+    <p:extLst>
+      <p:ext uri="{BB962C8B-B14F-4D97-AF65-F5344CB8AC3E}">
+        <p14:creationId xmlns:p14="http://schemas.microsoft.com/office/powerpoint/2010/main" val="2707706790"/>
       </p:ext>
     </p:extLst>
   </p:cSld>

--- a/git-ai-ppt/git-ai-research-record.pptx
+++ b/git-ai-ppt/git-ai-research-record.pptx
@@ -336,7 +336,7 @@
             </a:pPr>
             <a:fld id="{470563E6-95EB-4370-8635-C2BF33E7666D}" type="datetime1">
               <a:rPr lang="zh-CN" altLang="en-US"/>
-              <a:t>2026/9/2</a:t>
+              <a:t>2026/9/6</a:t>
             </a:fld>
             <a:endParaRPr lang="en-US" altLang="zh-CN"/>
           </a:p>
@@ -54806,7 +54806,7 @@
         <p:spPr>
           <a:xfrm>
             <a:off x="119336" y="1052736"/>
-            <a:ext cx="1074333" cy="700576"/>
+            <a:ext cx="1612942" cy="1346907"/>
           </a:xfrm>
           <a:prstGeom prst="rect">
             <a:avLst/>
@@ -54826,10 +54826,9 @@
               <a:buAutoNum type="arabicPeriod"/>
             </a:pPr>
             <a:r>
-              <a:rPr kumimoji="1" lang="en-US" altLang="zh-CN" sz="1400"/>
+              <a:rPr kumimoji="1" lang="zh-CN" sz="1400" noProof="1"/>
               <a:t>Codex</a:t>
             </a:r>
-            <a:endParaRPr kumimoji="1" lang="en-US" altLang="zh-CN" sz="1400" dirty="0"/>
           </a:p>
           <a:p>
             <a:pPr marL="342900" indent="-342900">
@@ -54838,7 +54837,31 @@
               </a:lnSpc>
               <a:buAutoNum type="arabicPeriod"/>
             </a:pPr>
-            <a:endParaRPr kumimoji="1" lang="en-US" altLang="zh-CN" sz="1400" dirty="0"/>
+            <a:r>
+              <a:rPr kumimoji="1" lang="zh-CN" sz="1400" noProof="1"/>
+              <a:t>OpenCode</a:t>
+            </a:r>
+          </a:p>
+          <a:p>
+            <a:pPr marL="342900" indent="-342900">
+              <a:lnSpc>
+                <a:spcPct val="150000"/>
+              </a:lnSpc>
+              <a:buAutoNum type="arabicPeriod"/>
+            </a:pPr>
+            <a:r>
+              <a:rPr kumimoji="1" lang="zh-CN" sz="1400" noProof="1"/>
+              <a:t>Kilo Code v7</a:t>
+            </a:r>
+          </a:p>
+          <a:p>
+            <a:pPr marL="342900" indent="-342900">
+              <a:lnSpc>
+                <a:spcPct val="150000"/>
+              </a:lnSpc>
+              <a:buAutoNum type="arabicPeriod"/>
+            </a:pPr>
+            <a:endParaRPr kumimoji="1" lang="zh-CN" sz="1400" noProof="1"/>
           </a:p>
         </p:txBody>
       </p:sp>
@@ -54879,38 +54902,14 @@
               </a:spcAft>
             </a:pPr>
             <a:r>
-              <a:rPr lang="zh-CN" altLang="en-US" sz="2800" b="1" dirty="0">
+              <a:rPr lang="zh-CN" sz="2800" b="1" noProof="1">
                 <a:solidFill>
                   <a:srgbClr val="213261"/>
                 </a:solidFill>
               </a:rPr>
-              <a:t>支持的 </a:t>
-            </a:r>
-            <a:r>
-              <a:rPr lang="en-US" altLang="zh-CN" sz="2800" b="1" dirty="0">
-                <a:solidFill>
-                  <a:srgbClr val="213261"/>
-                </a:solidFill>
-              </a:rPr>
-              <a:t>coding</a:t>
-            </a:r>
-            <a:r>
-              <a:rPr lang="zh-CN" altLang="en-US" sz="2800" b="1" dirty="0">
-                <a:solidFill>
-                  <a:srgbClr val="213261"/>
-                </a:solidFill>
-              </a:rPr>
-              <a:t> </a:t>
-            </a:r>
-            <a:r>
-              <a:rPr lang="en-US" altLang="zh-CN" sz="2800" b="1" dirty="0">
-                <a:solidFill>
-                  <a:srgbClr val="213261"/>
-                </a:solidFill>
-              </a:rPr>
-              <a:t>agent</a:t>
-            </a:r>
-            <a:endParaRPr sz="2800" b="1" dirty="0">
+              <a:t>支持的 coding agent</a:t>
+            </a:r>
+            <a:endParaRPr lang="zh-CN" sz="2800" b="1" noProof="1">
               <a:solidFill>
                 <a:srgbClr val="213261"/>
               </a:solidFill>
